--- a/final_presentation_slides_ar_updated.pptx
+++ b/final_presentation_slides_ar_updated.pptx
@@ -13,7 +13,6 @@
     <p:sldId id="261" r:id="rId12"/>
     <p:sldId id="262" r:id="rId13"/>
     <p:sldId id="263" r:id="rId14"/>
-    <p:sldId id="264" r:id="rId15"/>
   </p:sldIdLst>
   <p:sldSz cx="12191695" cy="6858000" type="screen4x3"/>
   <p:notesSz cx="6858000" cy="9144000"/>
@@ -3106,57 +3105,14 @@
       <p:grpSpPr/>
       <p:sp>
         <p:nvSpPr>
-          <p:cNvPr id="2" name="Rectangle 1"/>
-          <p:cNvSpPr/>
+          <p:cNvPr id="2" name="TextBox 1"/>
+          <p:cNvSpPr txBox="1"/>
           <p:nvPr/>
         </p:nvSpPr>
         <p:spPr>
           <a:xfrm>
-            <a:off x="1371600" y="2011680"/>
-            <a:ext cx="9445752" cy="36576"/>
-          </a:xfrm>
-          <a:prstGeom prst="rect">
-            <a:avLst/>
-          </a:prstGeom>
-          <a:solidFill>
-            <a:srgbClr val="C5A880"/>
-          </a:solidFill>
-          <a:ln>
-            <a:noFill/>
-          </a:ln>
-        </p:spPr>
-        <p:style>
-          <a:lnRef idx="1">
-            <a:schemeClr val="accent1"/>
-          </a:lnRef>
-          <a:fillRef idx="3">
-            <a:schemeClr val="accent1"/>
-          </a:fillRef>
-          <a:effectRef idx="2">
-            <a:schemeClr val="accent1"/>
-          </a:effectRef>
-          <a:fontRef idx="minor">
-            <a:schemeClr val="lt1"/>
-          </a:fontRef>
-        </p:style>
-        <p:txBody>
-          <a:bodyPr rtlCol="0" anchor="ctr"/>
-          <a:lstStyle/>
-          <a:p>
-            <a:pPr algn="ctr"/>
-          </a:p>
-        </p:txBody>
-      </p:sp>
-      <p:sp>
-        <p:nvSpPr>
-          <p:cNvPr id="3" name="TextBox 2"/>
-          <p:cNvSpPr txBox="1"/>
-          <p:nvPr/>
-        </p:nvSpPr>
-        <p:spPr>
-          <a:xfrm>
-            <a:off x="1371600" y="2286000"/>
-            <a:ext cx="9445752" cy="1828800"/>
+            <a:off x="914400" y="365760"/>
+            <a:ext cx="10360152" cy="365760"/>
           </a:xfrm>
           <a:prstGeom prst="rect">
             <a:avLst/>
@@ -3164,29 +3120,13 @@
           <a:noFill/>
         </p:spPr>
         <p:txBody>
-          <a:bodyPr wrap="square">
+          <a:bodyPr wrap="none">
             <a:spAutoFit/>
           </a:bodyPr>
           <a:lstStyle/>
           <a:p>
             <a:pPr algn="r">
-              <a:defRPr sz="3600" b="1">
-                <a:solidFill>
-                  <a:srgbClr val="FFFFFF"/>
-                </a:solidFill>
-                <a:latin typeface="Arial"/>
-              </a:defRPr>
-            </a:pPr>
-            <a:r>
-              <a:t>جسر القدس القانوني (JLM Legal Bridge)</a:t>
-            </a:r>
-          </a:p>
-          <a:p>
-            <a:pPr algn="r">
-              <a:spcBef>
-                <a:spcPts val="1200"/>
-              </a:spcBef>
-              <a:defRPr sz="2000">
+              <a:defRPr sz="1200" b="1">
                 <a:solidFill>
                   <a:srgbClr val="C5A880"/>
                 </a:solidFill>
@@ -3194,21 +3134,21 @@
               </a:defRPr>
             </a:pPr>
             <a:r>
-              <a:t>منصة رقمية ذكية لتسهيل وإدارة العلاقة بين المحامي والموكل، حجز المواعيد، وتقييم أهلية القضايا بالذكاء الاصطناعي</a:t>
-            </a:r>
-          </a:p>
-        </p:txBody>
-      </p:sp>
-      <p:sp>
-        <p:nvSpPr>
-          <p:cNvPr id="4" name="TextBox 3"/>
+              <a:t>جزء 1: وصف المشكلة والفرضيات</a:t>
+            </a:r>
+          </a:p>
+        </p:txBody>
+      </p:sp>
+      <p:sp>
+        <p:nvSpPr>
+          <p:cNvPr id="3" name="TextBox 2"/>
           <p:cNvSpPr txBox="1"/>
           <p:nvPr/>
         </p:nvSpPr>
         <p:spPr>
           <a:xfrm>
-            <a:off x="1371600" y="4389120"/>
-            <a:ext cx="9445752" cy="1828800"/>
+            <a:off x="914400" y="731520"/>
+            <a:ext cx="10360152" cy="731520"/>
           </a:xfrm>
           <a:prstGeom prst="rect">
             <a:avLst/>
@@ -3216,16 +3156,100 @@
           <a:noFill/>
         </p:spPr>
         <p:txBody>
+          <a:bodyPr wrap="none">
+            <a:spAutoFit/>
+          </a:bodyPr>
+          <a:lstStyle/>
+          <a:p>
+            <a:pPr algn="r">
+              <a:defRPr sz="2800" b="1">
+                <a:solidFill>
+                  <a:srgbClr val="FFFFFF"/>
+                </a:solidFill>
+                <a:latin typeface="Arial"/>
+              </a:defRPr>
+            </a:pPr>
+            <a:r>
+              <a:t>وصف المشكلة والفرضيات الأساسية (جزء 1)</a:t>
+            </a:r>
+          </a:p>
+        </p:txBody>
+      </p:sp>
+      <p:sp>
+        <p:nvSpPr>
+          <p:cNvPr id="4" name="TextBox 3"/>
+          <p:cNvSpPr txBox="1"/>
+          <p:nvPr/>
+        </p:nvSpPr>
+        <p:spPr>
+          <a:xfrm>
+            <a:off x="914400" y="1645920"/>
+            <a:ext cx="10360152" cy="4572000"/>
+          </a:xfrm>
+          <a:prstGeom prst="rect">
+            <a:avLst/>
+          </a:prstGeom>
+          <a:noFill/>
+        </p:spPr>
+        <p:txBody>
           <a:bodyPr wrap="square">
             <a:spAutoFit/>
           </a:bodyPr>
           <a:lstStyle/>
           <a:p>
             <a:pPr algn="r">
-              <a:spcBef>
-                <a:spcPts val="600"/>
-              </a:spcBef>
-              <a:defRPr sz="1400">
+              <a:spcAft>
+                <a:spcPts val="1000"/>
+              </a:spcAft>
+              <a:defRPr sz="1900" b="1">
+                <a:solidFill>
+                  <a:srgbClr val="FFFFFF"/>
+                </a:solidFill>
+                <a:latin typeface="Arial"/>
+              </a:defRPr>
+            </a:pPr>
+            <a:r>
+              <a:t>عنوان المشروع: جسر القدس القانوني (JLM Legal Bridge)</a:t>
+            </a:r>
+          </a:p>
+          <a:p>
+            <a:pPr algn="r">
+              <a:spcAft>
+                <a:spcPts val="1000"/>
+              </a:spcAft>
+              <a:defRPr sz="1900" b="1">
+                <a:solidFill>
+                  <a:srgbClr val="FFFFFF"/>
+                </a:solidFill>
+                <a:latin typeface="Arial"/>
+              </a:defRPr>
+            </a:pPr>
+            <a:r>
+              <a:t>عنوان فرعي: منصة رقمية ذكية لتسهيل وإدارة العلاقة بين المحامي والموكل، حجز المواعيد، وتقييم أهلية القضايا بالذكاء الاصطناعي.</a:t>
+            </a:r>
+          </a:p>
+          <a:p>
+            <a:pPr algn="r">
+              <a:spcAft>
+                <a:spcPts val="1000"/>
+              </a:spcAft>
+              <a:defRPr sz="1900" b="1">
+                <a:solidFill>
+                  <a:srgbClr val="FFFFFF"/>
+                </a:solidFill>
+                <a:latin typeface="Arial"/>
+              </a:defRPr>
+            </a:pPr>
+            <a:r>
+              <a:t>🔥 المشكلة الحقيقية (Pain حقيقي):</a:t>
+            </a:r>
+          </a:p>
+          <a:p>
+            <a:pPr lvl="1" algn="r">
+              <a:spcAft>
+                <a:spcPts val="1000"/>
+              </a:spcAft>
+              <a:defRPr sz="1600">
                 <a:solidFill>
                   <a:srgbClr val="A0AEC0"/>
                 </a:solidFill>
@@ -3233,15 +3257,47 @@
               </a:defRPr>
             </a:pPr>
             <a:r>
-              <a:t>مشروع التخرج في مساق إدارة المنتجات 2026</a:t>
+              <a:t>عند المحامي: مكالمات ورسائل كثيرة غير مناسبة | تضييع وقت على زبائن غير مؤهلين | تكرار نفس الأسئلة.</a:t>
+            </a:r>
+          </a:p>
+          <a:p>
+            <a:pPr lvl="1" algn="r">
+              <a:spcAft>
+                <a:spcPts val="1000"/>
+              </a:spcAft>
+              <a:defRPr sz="1600">
+                <a:solidFill>
+                  <a:srgbClr val="A0AEC0"/>
+                </a:solidFill>
+                <a:latin typeface="Arial"/>
+              </a:defRPr>
+            </a:pPr>
+            <a:r>
+              <a:t>عند الزبون: لا يعرف إن كانت قضيته "تستحق محامي" | لغة قانونية معقدة | انتظار طويل وردود غير واضحة | خوف من نظرة المحامي وصعوبة التواصل بسبب المكان والزمان.</a:t>
             </a:r>
           </a:p>
           <a:p>
             <a:pPr algn="r">
-              <a:spcBef>
-                <a:spcPts val="600"/>
-              </a:spcBef>
-              <a:defRPr sz="1400">
+              <a:spcAft>
+                <a:spcPts val="1000"/>
+              </a:spcAft>
+              <a:defRPr sz="1900" b="1">
+                <a:solidFill>
+                  <a:srgbClr val="FFFFFF"/>
+                </a:solidFill>
+                <a:latin typeface="Arial"/>
+              </a:defRPr>
+            </a:pPr>
+            <a:r>
+              <a:t>🎯 الجمهور المستهدف واحتياجاته:</a:t>
+            </a:r>
+          </a:p>
+          <a:p>
+            <a:pPr lvl="1" algn="r">
+              <a:spcAft>
+                <a:spcPts val="1000"/>
+              </a:spcAft>
+              <a:defRPr sz="1600">
                 <a:solidFill>
                   <a:srgbClr val="A0AEC0"/>
                 </a:solidFill>
@@ -3249,15 +3305,47 @@
               </a:defRPr>
             </a:pPr>
             <a:r>
-              <a:t>الكلية الأكاديمية أونو (OAC)</a:t>
+              <a:t>الزبون: حاجته لمعرفة القانون بسهولة وسرعة عن بُعد دون إحراج (لذلك وفرنا الشات الذكي التفاعلي).</a:t>
+            </a:r>
+          </a:p>
+          <a:p>
+            <a:pPr lvl="1" algn="r">
+              <a:spcAft>
+                <a:spcPts val="1000"/>
+              </a:spcAft>
+              <a:defRPr sz="1600">
+                <a:solidFill>
+                  <a:srgbClr val="A0AEC0"/>
+                </a:solidFill>
+                <a:latin typeface="Arial"/>
+              </a:defRPr>
+            </a:pPr>
+            <a:r>
+              <a:t>المحامي: بحاجة لتسهيل وإدارة المواعيد وتواصل أسرع بملفات زبائن مصفاة وجاهزة.</a:t>
             </a:r>
           </a:p>
           <a:p>
             <a:pPr algn="r">
-              <a:spcBef>
-                <a:spcPts val="600"/>
-              </a:spcBef>
-              <a:defRPr sz="1400">
+              <a:spcAft>
+                <a:spcPts val="1000"/>
+              </a:spcAft>
+              <a:defRPr sz="1900" b="1">
+                <a:solidFill>
+                  <a:srgbClr val="FFFFFF"/>
+                </a:solidFill>
+                <a:latin typeface="Arial"/>
+              </a:defRPr>
+            </a:pPr>
+            <a:r>
+              <a:t>💡 الفرضيات الأولية (الفرضيات الأساسية):</a:t>
+            </a:r>
+          </a:p>
+          <a:p>
+            <a:pPr lvl="1" algn="r">
+              <a:spcAft>
+                <a:spcPts val="1000"/>
+              </a:spcAft>
+              <a:defRPr sz="1600">
                 <a:solidFill>
                   <a:srgbClr val="A0AEC0"/>
                 </a:solidFill>
@@ -3265,7 +3353,39 @@
               </a:defRPr>
             </a:pPr>
             <a:r>
-              <a:t>تقديم: فريق مشروع جسر القدس</a:t>
+              <a:t>فرضية القيمة: فحص الأهلية الفوري والذكي عن بُعد سيزيد من استعداد الزبائن للتواصل بنسبة 40%.</a:t>
+            </a:r>
+          </a:p>
+          <a:p>
+            <a:pPr lvl="1" algn="r">
+              <a:spcAft>
+                <a:spcPts val="1000"/>
+              </a:spcAft>
+              <a:defRPr sz="1600">
+                <a:solidFill>
+                  <a:srgbClr val="A0AEC0"/>
+                </a:solidFill>
+                <a:latin typeface="Arial"/>
+              </a:defRPr>
+            </a:pPr>
+            <a:r>
+              <a:t>فرضية الاستخدام: استخدام التسجيل الصوتي يسهل وصف تفاصيل الحادث ويمنع هجر الاستبيان.</a:t>
+            </a:r>
+          </a:p>
+          <a:p>
+            <a:pPr lvl="1" algn="r">
+              <a:spcAft>
+                <a:spcPts val="1000"/>
+              </a:spcAft>
+              <a:defRPr sz="1600">
+                <a:solidFill>
+                  <a:srgbClr val="A0AEC0"/>
+                </a:solidFill>
+                <a:latin typeface="Arial"/>
+              </a:defRPr>
+            </a:pPr>
+            <a:r>
+              <a:t>فرضية الجدوى: دمج نظام الـ CRM والمواعيد سيوفر 60% من وقت الفرز والتنسيق الإداري للمكتب.</a:t>
             </a:r>
           </a:p>
         </p:txBody>
@@ -3327,7 +3447,7 @@
               </a:defRPr>
             </a:pPr>
             <a:r>
-              <a:t>جزء 1: تعريف المشكلة والفرضيات</a:t>
+              <a:t>جزء 2: ملخص بحث المستخدمين والرؤى المستخلصة</a:t>
             </a:r>
           </a:p>
         </p:txBody>
@@ -3363,7 +3483,7 @@
               </a:defRPr>
             </a:pPr>
             <a:r>
-              <a:t>تعريف المشكلة والاحتياج في السوق</a:t>
+              <a:t>نماذج المستخدمين والمهام وقصص المستخدم (جزء 2)</a:t>
             </a:r>
           </a:p>
         </p:txBody>
@@ -3392,9 +3512,9 @@
           <a:p>
             <a:pPr algn="r">
               <a:spcAft>
-                <a:spcPts val="1200"/>
-              </a:spcAft>
-              <a:defRPr sz="2000" b="1">
+                <a:spcPts val="1000"/>
+              </a:spcAft>
+              <a:defRPr sz="1900" b="1">
                 <a:solidFill>
                   <a:srgbClr val="FFFFFF"/>
                 </a:solidFill>
@@ -3402,15 +3522,47 @@
               </a:defRPr>
             </a:pPr>
             <a:r>
-              <a:t>المشكلة الرئيسية: عوائق حاسمة في الوصول إلى العدالة ونيل التعويضات الطبية لعمال القدس الشرقية المصابين.</a:t>
+              <a:t>👥 نماذج المستخدمين (Personas):</a:t>
+            </a:r>
+          </a:p>
+          <a:p>
+            <a:pPr lvl="1" algn="r">
+              <a:spcAft>
+                <a:spcPts val="1000"/>
+              </a:spcAft>
+              <a:defRPr sz="1600">
+                <a:solidFill>
+                  <a:srgbClr val="A0AEC0"/>
+                </a:solidFill>
+                <a:latin typeface="Arial"/>
+              </a:defRPr>
+            </a:pPr>
+            <a:r>
+              <a:t>الزبون عادل (عامل بناء، 42 عاماً): يخشى التكاليف المسبقة ونظرة المحامي السلبية له، ويبحث عن تقييم فوري ومستقل.</a:t>
+            </a:r>
+          </a:p>
+          <a:p>
+            <a:pPr lvl="1" algn="r">
+              <a:spcAft>
+                <a:spcPts val="1000"/>
+              </a:spcAft>
+              <a:defRPr sz="1600">
+                <a:solidFill>
+                  <a:srgbClr val="A0AEC0"/>
+                </a:solidFill>
+                <a:latin typeface="Arial"/>
+              </a:defRPr>
+            </a:pPr>
+            <a:r>
+              <a:t>المحامي يوسف (شريك، 35 عاماً): يعاني من تضييع الوقت على زبائن غير مؤهلين وتكرار نفس الأسئلة.</a:t>
             </a:r>
           </a:p>
           <a:p>
             <a:pPr algn="r">
               <a:spcAft>
-                <a:spcPts val="1200"/>
-              </a:spcAft>
-              <a:defRPr sz="2000" b="1">
+                <a:spcPts val="1000"/>
+              </a:spcAft>
+              <a:defRPr sz="1900" b="1">
                 <a:solidFill>
                   <a:srgbClr val="FFFFFF"/>
                 </a:solidFill>
@@ -3418,13 +3570,13 @@
               </a:defRPr>
             </a:pPr>
             <a:r>
-              <a:t>نقاط الألم الرئيسية في السوق:</a:t>
+              <a:t>🔥 نقاط الألم المكتشفة (Pain Points):</a:t>
             </a:r>
           </a:p>
           <a:p>
             <a:pPr lvl="1" algn="r">
               <a:spcAft>
-                <a:spcPts val="1200"/>
+                <a:spcPts val="1000"/>
               </a:spcAft>
               <a:defRPr sz="1600">
                 <a:solidFill>
@@ -3434,13 +3586,13 @@
               </a:defRPr>
             </a:pPr>
             <a:r>
-              <a:t>الخوف المالي: خوف العمال المستمر من تكاليف الاستشارة القانونية المرتفعة مسبقاً.</a:t>
+              <a:t>عند الزبون: ييأس ويبتعد عن المطالبة بحقه بسبب طول الإجراءات البيروقراطية والمجهود الكبير الذي يبذله لنجاح القضية.</a:t>
             </a:r>
           </a:p>
           <a:p>
             <a:pPr lvl="1" algn="r">
               <a:spcAft>
-                <a:spcPts val="1200"/>
+                <a:spcPts val="1000"/>
               </a:spcAft>
               <a:defRPr sz="1600">
                 <a:solidFill>
@@ -3450,13 +3602,29 @@
               </a:defRPr>
             </a:pPr>
             <a:r>
-              <a:t>حاجز اللغة والثقافة: القوانين والمعلومات مكتوبة باللغة العبرية القانونية المعقدة فقط.</a:t>
+              <a:t>عند المحامي: هدر ساعات العمل الثمينة في مكالمات الفرز اليدوي وتكرار الأسئلة ذاتها.</a:t>
+            </a:r>
+          </a:p>
+          <a:p>
+            <a:pPr algn="r">
+              <a:spcAft>
+                <a:spcPts val="1000"/>
+              </a:spcAft>
+              <a:defRPr sz="1900" b="1">
+                <a:solidFill>
+                  <a:srgbClr val="FFFFFF"/>
+                </a:solidFill>
+                <a:latin typeface="Arial"/>
+              </a:defRPr>
+            </a:pPr>
+            <a:r>
+              <a:t>🎯 تحليل المهام المطلوبة (JTBD):</a:t>
             </a:r>
           </a:p>
           <a:p>
             <a:pPr lvl="1" algn="r">
               <a:spcAft>
-                <a:spcPts val="1200"/>
+                <a:spcPts val="1000"/>
               </a:spcAft>
               <a:defRPr sz="1600">
                 <a:solidFill>
@@ -3466,13 +3634,13 @@
               </a:defRPr>
             </a:pPr>
             <a:r>
-              <a:t>الخوف الشخصي والوظيفي: خوف الفلاحين والعمال من الفصل أو التعرض للمضايقات عند رفع قضية.</a:t>
+              <a:t>المهمة 1 (الزبون): فحص أهلية قضيتي الطبية دون حرج أو التزام مالي (النجاح: إجابة واضحة "قضيتك تستحق/لا تستحق" خلال دقيقتين عن بعد).</a:t>
             </a:r>
           </a:p>
           <a:p>
             <a:pPr lvl="1" algn="r">
               <a:spcAft>
-                <a:spcPts val="1200"/>
+                <a:spcPts val="1000"/>
               </a:spcAft>
               <a:defRPr sz="1600">
                 <a:solidFill>
@@ -3482,15 +3650,15 @@
               </a:defRPr>
             </a:pPr>
             <a:r>
-              <a:t>التعقيد البيروقراطي: صعوبة جمع وفهم التقارير والمستندات الطبية المطلوبة بعد الإصابة مباشرة.</a:t>
+              <a:t>المهمة 2 (المحامي): تصفية واستلام ملفات موكلين مؤهلين وجاهزين بالوثائق (النجاح: استلام ملخص القضية الطبي بملف مدمج عبر لوحة التحكم).</a:t>
             </a:r>
           </a:p>
           <a:p>
             <a:pPr algn="r">
               <a:spcAft>
-                <a:spcPts val="1200"/>
-              </a:spcAft>
-              <a:defRPr sz="2000" b="1">
+                <a:spcPts val="1000"/>
+              </a:spcAft>
+              <a:defRPr sz="1900" b="1">
                 <a:solidFill>
                   <a:srgbClr val="FFFFFF"/>
                 </a:solidFill>
@@ -3498,13 +3666,13 @@
               </a:defRPr>
             </a:pPr>
             <a:r>
-              <a:t>الفرضيات الأساسية التي تم تبنيها في بداية المشروع (Hypotheses):</a:t>
+              <a:t>📝 قصص المستخدمين (User Stories):</a:t>
             </a:r>
           </a:p>
           <a:p>
             <a:pPr lvl="1" algn="r">
               <a:spcAft>
-                <a:spcPts val="1200"/>
+                <a:spcPts val="1000"/>
               </a:spcAft>
               <a:defRPr sz="1600">
                 <a:solidFill>
@@ -3514,13 +3682,13 @@
               </a:defRPr>
             </a:pPr>
             <a:r>
-              <a:t>فرضية القيمة (Value): توفير استبيان رقمي تفاعلي بلغة الأم ومجاناً سيزيد من التجاوب بنسبة 40%.</a:t>
+              <a:t>בתור זבון חרד שאינו בטוח אם המקרה שלו מוגדר כתאונת עבודה, כאשר אני מתבייש לפנות ישירות למשרד, אני רוצה להשתמש בצ'אט בוט אנונימי ונגיש בשפתי, כדי שאקבל אישור ראשוני לזכאותי ללא שיפוט.</a:t>
             </a:r>
           </a:p>
           <a:p>
             <a:pPr lvl="1" algn="r">
               <a:spcAft>
-                <a:spcPts val="1200"/>
+                <a:spcPts val="1000"/>
               </a:spcAft>
               <a:defRPr sz="1600">
                 <a:solidFill>
@@ -3530,23 +3698,7 @@
               </a:defRPr>
             </a:pPr>
             <a:r>
-              <a:t>فرضية سهولة الاستخدام (Usability): واجهة الإدخال والتسجيل الصوتي (Voice-to-Text) ستمنع الهجر وصعوبة الكتابة.</a:t>
-            </a:r>
-          </a:p>
-          <a:p>
-            <a:pPr lvl="1" algn="r">
-              <a:spcAft>
-                <a:spcPts val="1200"/>
-              </a:spcAft>
-              <a:defRPr sz="1600">
-                <a:solidFill>
-                  <a:srgbClr val="A0AEC0"/>
-                </a:solidFill>
-                <a:latin typeface="Arial"/>
-              </a:defRPr>
-            </a:pPr>
-            <a:r>
-              <a:t>فرضية البقاء التجاري (Viability): مبدأ 'الدفع عند النجاح فقط' (No Win = No Fee) سيزيل الخوف المالي تماماً.</a:t>
+              <a:t>בתור משתמש רגיש המשתף פרטים רפואיים, כאשר אני מסיים את הבדיקה בצ'אט, אני רוצה לבחור באופן מפורש אם לשלוח את המידע או להשמיד אותו לצמיתות, כדי שארגיש שליטה מוחלטת במידע הפרטי שלי.</a:t>
             </a:r>
           </a:p>
         </p:txBody>
@@ -3608,7 +3760,7 @@
               </a:defRPr>
             </a:pPr>
             <a:r>
-              <a:t>جزء 2: ملخص بحث المستخدمين والرؤى المستخلصة</a:t>
+              <a:t>جزء 3: ملخص دراسة السوق والتوجهات</a:t>
             </a:r>
           </a:p>
         </p:txBody>
@@ -3644,7 +3796,7 @@
               </a:defRPr>
             </a:pPr>
             <a:r>
-              <a:t>نماذج المستخدمين (Personas) والـ JTBD وقصص المستخدم</a:t>
+              <a:t>الحلول الحالية، التوجهات التقنية وتحليل SWOT (جزء 3)</a:t>
             </a:r>
           </a:p>
         </p:txBody>
@@ -3673,9 +3825,9 @@
           <a:p>
             <a:pPr algn="r">
               <a:spcAft>
-                <a:spcPts val="1200"/>
-              </a:spcAft>
-              <a:defRPr sz="2000" b="1">
+                <a:spcPts val="1000"/>
+              </a:spcAft>
+              <a:defRPr sz="1900" b="1">
                 <a:solidFill>
                   <a:srgbClr val="FFFFFF"/>
                 </a:solidFill>
@@ -3683,13 +3835,13 @@
               </a:defRPr>
             </a:pPr>
             <a:r>
-              <a:t>نماذج العملاء المستهدفين (Personas):</a:t>
+              <a:t>🔍 الحلول الحالية والفجوة في السوق:</a:t>
             </a:r>
           </a:p>
           <a:p>
             <a:pPr lvl="1" algn="r">
               <a:spcAft>
-                <a:spcPts val="1200"/>
+                <a:spcPts val="1000"/>
               </a:spcAft>
               <a:defRPr sz="1600">
                 <a:solidFill>
@@ -3699,13 +3851,13 @@
               </a:defRPr>
             </a:pPr>
             <a:r>
-              <a:t>عادل (عامل بناء مصاب، 42 عاماً، العيساوية): لغته العبرية ضعيفة، متخوف من التكاليف، يستخدم الهاتف فقط.</a:t>
+              <a:t>النماذج الرقمية الثابتة: طويلة ومعقدة، باللغة العبرية فقط، وتؤدي لهجر الموقع لغياب المنطق التفاعلي.</a:t>
             </a:r>
           </a:p>
           <a:p>
             <a:pPr lvl="1" algn="r">
               <a:spcAft>
-                <a:spcPts val="1200"/>
+                <a:spcPts val="1000"/>
               </a:spcAft>
               <a:defRPr sz="1600">
                 <a:solidFill>
@@ -3715,15 +3867,31 @@
               </a:defRPr>
             </a:pPr>
             <a:r>
-              <a:t>المحامي يوسف (شريك في مكتب تعويضات، 35 عاماً): يضيع 60% من وقته في التصفية اليدوية لقضايا لا أمل قانوني فيها.</a:t>
+              <a:t>التواصل المباشر والزيارة: تتطلب جهداً ووقتاً كبيراً، ومخاطرة مادية ونفسية تؤدي ليأس الزبون مبكراً.</a:t>
+            </a:r>
+          </a:p>
+          <a:p>
+            <a:pPr lvl="1" algn="r">
+              <a:spcAft>
+                <a:spcPts val="1000"/>
+              </a:spcAft>
+              <a:defRPr sz="1600">
+                <a:solidFill>
+                  <a:srgbClr val="A0AEC0"/>
+                </a:solidFill>
+                <a:latin typeface="Arial"/>
+              </a:defRPr>
+            </a:pPr>
+            <a:r>
+              <a:t>الفجوة المكتشفة: غياب منصة موحدة تجمع بين تقييم الأهلية التلقائي (AI) ولوحة تحكم المحامي لتنظيم تواصل أسرع دون تشتيت.</a:t>
             </a:r>
           </a:p>
           <a:p>
             <a:pPr algn="r">
               <a:spcAft>
-                <a:spcPts val="1200"/>
-              </a:spcAft>
-              <a:defRPr sz="2000" b="1">
+                <a:spcPts val="1000"/>
+              </a:spcAft>
+              <a:defRPr sz="1900" b="1">
                 <a:solidFill>
                   <a:srgbClr val="FFFFFF"/>
                 </a:solidFill>
@@ -3731,13 +3899,13 @@
               </a:defRPr>
             </a:pPr>
             <a:r>
-              <a:t>تحليل المهام المطلوبة للمستخدمين (Jobs-To-Be-Done):</a:t>
+              <a:t>📈 التوجهات التقنية الرائدة:</a:t>
             </a:r>
           </a:p>
           <a:p>
             <a:pPr lvl="1" algn="r">
               <a:spcAft>
-                <a:spcPts val="1200"/>
+                <a:spcPts val="1000"/>
               </a:spcAft>
               <a:defRPr sz="1600">
                 <a:solidFill>
@@ -3747,13 +3915,13 @@
               </a:defRPr>
             </a:pPr>
             <a:r>
-              <a:t>المهمة 1 (فحص الأهلية): الحصول على تقييم فوري لأهلية القضية خلال دقيقتين بلمسة واحدة من هاتف العميل بالمنزل.</a:t>
+              <a:t>الدردشة القانونية الذكية (Conversational Intake): أخذ تفاصيل الحوادث عبر دردشة ودية في الموبايل.</a:t>
             </a:r>
           </a:p>
           <a:p>
             <a:pPr lvl="1" algn="r">
               <a:spcAft>
-                <a:spcPts val="1200"/>
+                <a:spcPts val="1000"/>
               </a:spcAft>
               <a:defRPr sz="1600">
                 <a:solidFill>
@@ -3763,15 +3931,31 @@
               </a:defRPr>
             </a:pPr>
             <a:r>
-              <a:t>المهمة 2 (مشاركة التفاصيل): شرح ملابسات الحادثة صوتياً بلغة الأم مع تحكم مطلق بالخصوصية (خيار مسح الملف).</a:t>
+              <a:t>تقييم الأهلية بالذكاء الاصطناعي (AI Eligibility): فحص إمكانية نجاح القضية تلقائياً بناءً على المعطيات الطبية.</a:t>
+            </a:r>
+          </a:p>
+          <a:p>
+            <a:pPr lvl="1" algn="r">
+              <a:spcAft>
+                <a:spcPts val="1000"/>
+              </a:spcAft>
+              <a:defRPr sz="1600">
+                <a:solidFill>
+                  <a:srgbClr val="A0AEC0"/>
+                </a:solidFill>
+                <a:latin typeface="Arial"/>
+              </a:defRPr>
+            </a:pPr>
+            <a:r>
+              <a:t>إدارة الأنظمة الموحدة (Unified Practice Management): ربط طلبات الزبائن مباشرة بجدول مواعيد وملفات المحامي (Outlook).</a:t>
             </a:r>
           </a:p>
           <a:p>
             <a:pPr algn="r">
               <a:spcAft>
-                <a:spcPts val="1200"/>
-              </a:spcAft>
-              <a:defRPr sz="2000" b="1">
+                <a:spcPts val="1000"/>
+              </a:spcAft>
+              <a:defRPr sz="1900" b="1">
                 <a:solidFill>
                   <a:srgbClr val="FFFFFF"/>
                 </a:solidFill>
@@ -3779,13 +3963,13 @@
               </a:defRPr>
             </a:pPr>
             <a:r>
-              <a:t>قصة المستخدم الأساسية (User Story):</a:t>
+              <a:t>📊 تحليل SWOT للمشروع:</a:t>
             </a:r>
           </a:p>
           <a:p>
             <a:pPr lvl="1" algn="r">
               <a:spcAft>
-                <a:spcPts val="1200"/>
+                <a:spcPts val="1000"/>
               </a:spcAft>
               <a:defRPr sz="1600">
                 <a:solidFill>
@@ -3795,7 +3979,55 @@
               </a:defRPr>
             </a:pPr>
             <a:r>
-              <a:t>بصفتي عاملاً مصاباً لا يتقن اللغة العبرية، عندما أكون مستلقياً في المنزل بعد حادثة عمل، أريد إجابة استبيان تفاعلي باللغة العربية، لأعرف فوراً فرصة حصولي على تعويض دون التزامات مالية مسبقة.</a:t>
+              <a:t>חוזקות (نقاط القوة): فحص الأهلية المخصص والذكي، توفير وقت الفرز للمحامي، تنظيم فوري للمواعيد وتكامل مع Outlook.</a:t>
+            </a:r>
+          </a:p>
+          <a:p>
+            <a:pPr lvl="1" algn="r">
+              <a:spcAft>
+                <a:spcPts val="1000"/>
+              </a:spcAft>
+              <a:defRPr sz="1600">
+                <a:solidFill>
+                  <a:srgbClr val="A0AEC0"/>
+                </a:solidFill>
+                <a:latin typeface="Arial"/>
+              </a:defRPr>
+            </a:pPr>
+            <a:r>
+              <a:t>חולשות (نقاط الضعف): اعتماد أداء المنصة على اتصال الإنترنت لدى هاتف الزبون.</a:t>
+            </a:r>
+          </a:p>
+          <a:p>
+            <a:pPr lvl="1" algn="r">
+              <a:spcAft>
+                <a:spcPts val="1000"/>
+              </a:spcAft>
+              <a:defRPr sz="1600">
+                <a:solidFill>
+                  <a:srgbClr val="A0AEC0"/>
+                </a:solidFill>
+                <a:latin typeface="Arial"/>
+              </a:defRPr>
+            </a:pPr>
+            <a:r>
+              <a:t>הזדמנויות (الفرص): التوسع مستقبلاً لدمج النظام مع WhatsApp Business API للوصول الأسهل للزبائن.</a:t>
+            </a:r>
+          </a:p>
+          <a:p>
+            <a:pPr lvl="1" algn="r">
+              <a:spcAft>
+                <a:spcPts val="1000"/>
+              </a:spcAft>
+              <a:defRPr sz="1600">
+                <a:solidFill>
+                  <a:srgbClr val="A0AEC0"/>
+                </a:solidFill>
+                <a:latin typeface="Arial"/>
+              </a:defRPr>
+            </a:pPr>
+            <a:r>
+              <a:t>איומים (التهديدات): مقاومة مكاتب المحاماة التقليدية للتطوير الرقمي أو استنساخ الفكرة من شركات أتمتة كبرى.</a:t>
             </a:r>
           </a:p>
         </p:txBody>
@@ -3857,7 +4089,7 @@
               </a:defRPr>
             </a:pPr>
             <a:r>
-              <a:t>جزء 3: ملخص دراسة السوق والتوجهات</a:t>
+              <a:t>جزء 4: رؤية المنتج وقيمة العرض الفريدة</a:t>
             </a:r>
           </a:p>
         </p:txBody>
@@ -3893,7 +4125,7 @@
               </a:defRPr>
             </a:pPr>
             <a:r>
-              <a:t>الحلول الحالية في السوق، التوجهات التقنية وتحليل SWOT</a:t>
+              <a:t>الرؤية، وقيمة العرض الفريدة وتثبيت الفرضيات (جزء 4)</a:t>
             </a:r>
           </a:p>
         </p:txBody>
@@ -3922,9 +4154,9 @@
           <a:p>
             <a:pPr algn="r">
               <a:spcAft>
-                <a:spcPts val="1200"/>
-              </a:spcAft>
-              <a:defRPr sz="2000" b="1">
+                <a:spcPts val="1000"/>
+              </a:spcAft>
+              <a:defRPr sz="1900" b="1">
                 <a:solidFill>
                   <a:srgbClr val="FFFFFF"/>
                 </a:solidFill>
@@ -3932,13 +4164,29 @@
               </a:defRPr>
             </a:pPr>
             <a:r>
-              <a:t>الحلول الحالية في السوق والفجوات الرئيسية:</a:t>
+              <a:t>🎯 رؤية المنتج: إزالة عوائق الخوف والتعقيد البيروقراطي، لتكون المنصة الرقمية الأكثر موثوقية وأماناً لربط المصابين بحقوقهم والتعويضات العادلة بأسرع وقت.</a:t>
+            </a:r>
+          </a:p>
+          <a:p>
+            <a:pPr algn="r">
+              <a:spcAft>
+                <a:spcPts val="1000"/>
+              </a:spcAft>
+              <a:defRPr sz="1900" b="1">
+                <a:solidFill>
+                  <a:srgbClr val="FFFFFF"/>
+                </a:solidFill>
+                <a:latin typeface="Arial"/>
+              </a:defRPr>
+            </a:pPr>
+            <a:r>
+              <a:t>💡 قيمة المنتج الفريدة (Unique Value Proposition):</a:t>
             </a:r>
           </a:p>
           <a:p>
             <a:pPr lvl="1" algn="r">
               <a:spcAft>
-                <a:spcPts val="1200"/>
+                <a:spcPts val="1000"/>
               </a:spcAft>
               <a:defRPr sz="1600">
                 <a:solidFill>
@@ -3948,13 +4196,29 @@
               </a:defRPr>
             </a:pPr>
             <a:r>
-              <a:t>النماذج الثابتة بالمواقع: باللغة العبرية فقط، طويلة ومعقدة، تؤدي لمعدل هجر يفوق 70% على الهواتف.</a:t>
+              <a:t>تقييم أهلية التعويض القانوني وتسهيل حجز المواعيد مع المحامي خلال دقيقتين فقط، بلغة بسيطة، مجاناً وبدون التزامات مسبقة – مع خصوصية كاملة وتحكم مطلق ببياناتك.</a:t>
+            </a:r>
+          </a:p>
+          <a:p>
+            <a:pPr algn="r">
+              <a:spcAft>
+                <a:spcPts val="1000"/>
+              </a:spcAft>
+              <a:defRPr sz="1900" b="1">
+                <a:solidFill>
+                  <a:srgbClr val="FFFFFF"/>
+                </a:solidFill>
+                <a:latin typeface="Arial"/>
+              </a:defRPr>
+            </a:pPr>
+            <a:r>
+              <a:t>⚔️ مقارنة المنافسين (النقاط التي نتفوق بها):</a:t>
             </a:r>
           </a:p>
           <a:p>
             <a:pPr lvl="1" algn="r">
               <a:spcAft>
-                <a:spcPts val="1200"/>
+                <a:spcPts val="1000"/>
               </a:spcAft>
               <a:defRPr sz="1600">
                 <a:solidFill>
@@ -3964,13 +4228,13 @@
               </a:defRPr>
             </a:pPr>
             <a:r>
-              <a:t>الزيارات الفعلية للمكاتب: عائق نفسي ومالي كبير، وتتطلب مصاريف مواصلات وتنسيق مواعيد مسبق.</a:t>
+              <a:t>توطين ودعم ثنائي اللغة ديناميكي بالكامل: (المنافسون: صفحات ثابتة وبالعبرية فقط).</a:t>
             </a:r>
           </a:p>
           <a:p>
             <a:pPr lvl="1" algn="r">
               <a:spcAft>
-                <a:spcPts val="1200"/>
+                <a:spcPts val="1000"/>
               </a:spcAft>
               <a:defRPr sz="1600">
                 <a:solidFill>
@@ -3980,15 +4244,31 @@
               </a:defRPr>
             </a:pPr>
             <a:r>
-              <a:t>الفجوة في السوق: غياب حل تفاعلي مرن داعم للهواتف الذكية، ثنائي اللغة مع إدخال صوتي مدمج لقضايا الإصابات.</a:t>
+              <a:t>واجهة إدخال صوتي مدمجة وسلسة: (المنافسون: غير متوفرة، تعتمد على الكتابة الطويلة).</a:t>
+            </a:r>
+          </a:p>
+          <a:p>
+            <a:pPr lvl="1" algn="r">
+              <a:spcAft>
+                <a:spcPts val="1000"/>
+              </a:spcAft>
+              <a:defRPr sz="1600">
+                <a:solidFill>
+                  <a:srgbClr val="A0AEC0"/>
+                </a:solidFill>
+                <a:latin typeface="Arial"/>
+              </a:defRPr>
+            </a:pPr>
+            <a:r>
+              <a:t>تكامل نظام المواعيد والـ CRM للمحامي: (المنافسون: نماذج اتصال جامدة تتطلب اتصالاً هاتفياً لاحقاً).</a:t>
             </a:r>
           </a:p>
           <a:p>
             <a:pPr algn="r">
               <a:spcAft>
-                <a:spcPts val="1200"/>
-              </a:spcAft>
-              <a:defRPr sz="2000" b="1">
+                <a:spcPts val="1000"/>
+              </a:spcAft>
+              <a:defRPr sz="1900" b="1">
                 <a:solidFill>
                   <a:srgbClr val="FFFFFF"/>
                 </a:solidFill>
@@ -3996,13 +4276,13 @@
               </a:defRPr>
             </a:pPr>
             <a:r>
-              <a:t>التوجهات التقنية الرائدة (LegalTech &amp; AI):</a:t>
+              <a:t>✔ التحقق من الفرضيات (Validation):</a:t>
             </a:r>
           </a:p>
           <a:p>
             <a:pPr lvl="1" algn="r">
               <a:spcAft>
-                <a:spcPts val="1200"/>
+                <a:spcPts val="1000"/>
               </a:spcAft>
               <a:defRPr sz="1600">
                 <a:solidFill>
@@ -4012,13 +4292,13 @@
               </a:defRPr>
             </a:pPr>
             <a:r>
-              <a:t>Conversational Intake: تحول المكاتب العالمية من النماذج الكلاسيكية إلى الدردشة التفاعلية لتسهيل جمع البيانات.</a:t>
+              <a:t>فرضية تأخير طلب الهاتف للنهاية: أثبتت صحتها بمنع هجر الموقع وزيادة ثقة الزبون.</a:t>
             </a:r>
           </a:p>
           <a:p>
             <a:pPr lvl="1" algn="r">
               <a:spcAft>
-                <a:spcPts val="1200"/>
+                <a:spcPts val="1000"/>
               </a:spcAft>
               <a:defRPr sz="1600">
                 <a:solidFill>
@@ -4028,87 +4308,7 @@
               </a:defRPr>
             </a:pPr>
             <a:r>
-              <a:t>Voice User Interfaces: انتشار الواجهات الصوتية لخدمة الفئات العمالية التي تواجه صعوبة في الكتابة.</a:t>
-            </a:r>
-          </a:p>
-          <a:p>
-            <a:pPr algn="r">
-              <a:spcAft>
-                <a:spcPts val="1200"/>
-              </a:spcAft>
-              <a:defRPr sz="2000" b="1">
-                <a:solidFill>
-                  <a:srgbClr val="FFFFFF"/>
-                </a:solidFill>
-                <a:latin typeface="Arial"/>
-              </a:defRPr>
-            </a:pPr>
-            <a:r>
-              <a:t>تحليل SWOT للمشروع:</a:t>
-            </a:r>
-          </a:p>
-          <a:p>
-            <a:pPr lvl="1" algn="r">
-              <a:spcAft>
-                <a:spcPts val="1200"/>
-              </a:spcAft>
-              <a:defRPr sz="1600">
-                <a:solidFill>
-                  <a:srgbClr val="A0AEC0"/>
-                </a:solidFill>
-                <a:latin typeface="Arial"/>
-              </a:defRPr>
-            </a:pPr>
-            <a:r>
-              <a:t>نقاط القوة (S): دعم ثنائي اللغة متكامل، تحويل الصوت لنصوص، توجيه وتخصيص ذكي للأسئلة.</a:t>
-            </a:r>
-          </a:p>
-          <a:p>
-            <a:pPr lvl="1" algn="r">
-              <a:spcAft>
-                <a:spcPts val="1200"/>
-              </a:spcAft>
-              <a:defRPr sz="1600">
-                <a:solidFill>
-                  <a:srgbClr val="A0AEC0"/>
-                </a:solidFill>
-                <a:latin typeface="Arial"/>
-              </a:defRPr>
-            </a:pPr>
-            <a:r>
-              <a:t>نقاط الضعف (W): اعتماد العميل الكامل على جودة اتصال الإنترنت في هاتف المحمول.</a:t>
-            </a:r>
-          </a:p>
-          <a:p>
-            <a:pPr lvl="1" algn="r">
-              <a:spcAft>
-                <a:spcPts val="1200"/>
-              </a:spcAft>
-              <a:defRPr sz="1600">
-                <a:solidFill>
-                  <a:srgbClr val="A0AEC0"/>
-                </a:solidFill>
-                <a:latin typeface="Arial"/>
-              </a:defRPr>
-            </a:pPr>
-            <a:r>
-              <a:t>الفرص (O): دمج الخدمة مع WhatsApp Business API للوصول إلى أكبر شريحة عمالية ممكنة.</a:t>
-            </a:r>
-          </a:p>
-          <a:p>
-            <a:pPr lvl="1" algn="r">
-              <a:spcAft>
-                <a:spcPts val="1200"/>
-              </a:spcAft>
-              <a:defRPr sz="1600">
-                <a:solidFill>
-                  <a:srgbClr val="A0AEC0"/>
-                </a:solidFill>
-                <a:latin typeface="Arial"/>
-              </a:defRPr>
-            </a:pPr>
-            <a:r>
-              <a:t>التهديدات (T): قيام مكاتب المحاماة الكبرى بنسخ الفكرة التقنية أو حدوث تغييرات في قوانين التأمين.</a:t>
+              <a:t>فرضية التسجيل الصوتي: أثبتت نجاحها بتقليص جهد تعبئة المصطلحات الطبية للعمال.</a:t>
             </a:r>
           </a:p>
         </p:txBody>
@@ -4170,7 +4370,7 @@
               </a:defRPr>
             </a:pPr>
             <a:r>
-              <a:t>جزء 4: رؤية المنتج وقيمة العرض الفريدة</a:t>
+              <a:t>جزء 5: نموذج العمل التجاري Canvas (المراحل 1-4 فقط)</a:t>
             </a:r>
           </a:p>
         </p:txBody>
@@ -4206,7 +4406,7 @@
               </a:defRPr>
             </a:pPr>
             <a:r>
-              <a:t>الرؤية، وقيمة العرض الفريدة (UVP) وتثبيت الفرضيات</a:t>
+              <a:t>نموذج العمل التجاري (جزء 5)</a:t>
             </a:r>
           </a:p>
         </p:txBody>
@@ -4235,9 +4435,9 @@
           <a:p>
             <a:pPr algn="r">
               <a:spcAft>
-                <a:spcPts val="1200"/>
-              </a:spcAft>
-              <a:defRPr sz="2000" b="1">
+                <a:spcPts val="1000"/>
+              </a:spcAft>
+              <a:defRPr sz="1900" b="1">
                 <a:solidFill>
                   <a:srgbClr val="FFFFFF"/>
                 </a:solidFill>
@@ -4245,15 +4445,47 @@
               </a:defRPr>
             </a:pPr>
             <a:r>
-              <a:t>رؤية المنتج: إزالة عوائق اللغة والخوف المالي ليكون المنصة الرقمية الأكثر أماناً وموثوقية لربط المصابين بالقدس بحقوقهم والتعويضات العادلة.</a:t>
+              <a:t>.1 شرائح العملاء (Customer Segments):</a:t>
+            </a:r>
+          </a:p>
+          <a:p>
+            <a:pPr lvl="1" algn="r">
+              <a:spcAft>
+                <a:spcPts val="1000"/>
+              </a:spcAft>
+              <a:defRPr sz="1600">
+                <a:solidFill>
+                  <a:srgbClr val="A0AEC0"/>
+                </a:solidFill>
+                <a:latin typeface="Arial"/>
+              </a:defRPr>
+            </a:pPr>
+            <a:r>
+              <a:t>الزبائن والمصابون في حوادث العمل والطرق الباحثون عن تقييم فوري وتواصل سهل مع محامٍ.</a:t>
+            </a:r>
+          </a:p>
+          <a:p>
+            <a:pPr lvl="1" algn="r">
+              <a:spcAft>
+                <a:spcPts val="1000"/>
+              </a:spcAft>
+              <a:defRPr sz="1600">
+                <a:solidFill>
+                  <a:srgbClr val="A0AEC0"/>
+                </a:solidFill>
+                <a:latin typeface="Arial"/>
+              </a:defRPr>
+            </a:pPr>
+            <a:r>
+              <a:t>مكاتب المحاماة المتخصصة في قضايا التعويضات الباحثة عن ملفات عملاء مؤهلة ومصنفة تلقائياً.</a:t>
             </a:r>
           </a:p>
           <a:p>
             <a:pPr algn="r">
               <a:spcAft>
-                <a:spcPts val="1200"/>
-              </a:spcAft>
-              <a:defRPr sz="2000" b="1">
+                <a:spcPts val="1000"/>
+              </a:spcAft>
+              <a:defRPr sz="1900" b="1">
                 <a:solidFill>
                   <a:srgbClr val="FFFFFF"/>
                 </a:solidFill>
@@ -4261,13 +4493,13 @@
               </a:defRPr>
             </a:pPr>
             <a:r>
-              <a:t>قيمة العرض الفريدة (Unique Value Proposition):</a:t>
+              <a:t>.2 القيمة المضافة (Value Propositions):</a:t>
             </a:r>
           </a:p>
           <a:p>
             <a:pPr lvl="1" algn="r">
               <a:spcAft>
-                <a:spcPts val="1200"/>
+                <a:spcPts val="1000"/>
               </a:spcAft>
               <a:defRPr sz="1600">
                 <a:solidFill>
@@ -4277,15 +4509,31 @@
               </a:defRPr>
             </a:pPr>
             <a:r>
-              <a:t>فحص وتقييم أهلية التعويض القانوني خلال دقيקתين فقط، بلغة الأم الخاصة بك، مجاناً وبدون التزامات مسبقة – مع تحكم كامل بخصوصية بياناتك.</a:t>
+              <a:t>للزبون: فحص سريع وسلس مجاناً، حجز مواعيد فوري، وحماية خصوصية تامة دون خطر مالي مسبق.</a:t>
+            </a:r>
+          </a:p>
+          <a:p>
+            <a:pPr lvl="1" algn="r">
+              <a:spcAft>
+                <a:spcPts val="1000"/>
+              </a:spcAft>
+              <a:defRPr sz="1600">
+                <a:solidFill>
+                  <a:srgbClr val="A0AEC0"/>
+                </a:solidFill>
+                <a:latin typeface="Arial"/>
+              </a:defRPr>
+            </a:pPr>
+            <a:r>
+              <a:t>للمحامي: ملف قضية متكامل ومصنف مع تقييم أولي، وجدول مواعيد منظم يمنع الفوضى والمكالمات المتكررة.</a:t>
             </a:r>
           </a:p>
           <a:p>
             <a:pPr algn="r">
               <a:spcAft>
-                <a:spcPts val="1200"/>
-              </a:spcAft>
-              <a:defRPr sz="2000" b="1">
+                <a:spcPts val="1000"/>
+              </a:spcAft>
+              <a:defRPr sz="1900" b="1">
                 <a:solidFill>
                   <a:srgbClr val="FFFFFF"/>
                 </a:solidFill>
@@ -4293,13 +4541,13 @@
               </a:defRPr>
             </a:pPr>
             <a:r>
-              <a:t>التحقق من الفرضيات وتثبيتها من خلال البحث (Validation):</a:t>
+              <a:t>.3 القنوات (Channels):</a:t>
             </a:r>
           </a:p>
           <a:p>
             <a:pPr lvl="1" algn="r">
               <a:spcAft>
-                <a:spcPts val="1200"/>
+                <a:spcPts val="1000"/>
               </a:spcAft>
               <a:defRPr sz="1600">
                 <a:solidFill>
@@ -4309,13 +4557,29 @@
               </a:defRPr>
             </a:pPr>
             <a:r>
-              <a:t>فرضية 1 (طلب رقم الهاتف في النهاية): أثبتت صحتها كعامل مانع لهجر الاستبيان وزيادة معدل الثقة.</a:t>
+              <a:t>التسويق الرقمي المستهدف (SEO/SEM) عبر محركات البحث، المجموعات المهنية وتجمعات العمال الرقمية.</a:t>
+            </a:r>
+          </a:p>
+          <a:p>
+            <a:pPr algn="r">
+              <a:spcAft>
+                <a:spcPts val="1000"/>
+              </a:spcAft>
+              <a:defRPr sz="1900" b="1">
+                <a:solidFill>
+                  <a:srgbClr val="FFFFFF"/>
+                </a:solidFill>
+                <a:latin typeface="Arial"/>
+              </a:defRPr>
+            </a:pPr>
+            <a:r>
+              <a:t>.4 علاقات العملاء (Customer Relationships):</a:t>
             </a:r>
           </a:p>
           <a:p>
             <a:pPr lvl="1" algn="r">
               <a:spcAft>
-                <a:spcPts val="1200"/>
+                <a:spcPts val="1000"/>
               </a:spcAft>
               <a:defRPr sz="1600">
                 <a:solidFill>
@@ -4325,7 +4589,7 @@
               </a:defRPr>
             </a:pPr>
             <a:r>
-              <a:t>فرضية 2 (تفضيل الصوت على الكتابة): أثبتت صحتها بتسهيل إدخال البيانات للعمال وتقليل عقبات تعبئة التقارير.</a:t>
+              <a:t>علاقة قائمة على الثقة والخصوصية المطلقة (إمكانية تدمير البيانات بلمسة واحدة)، وتسهيل حجز وتعديل المواعيد بمرونة.</a:t>
             </a:r>
           </a:p>
         </p:txBody>
@@ -4387,7 +4651,7 @@
               </a:defRPr>
             </a:pPr>
             <a:r>
-              <a:t>جزء 5: نموذج العمل التجاري Canvas (المراحل 1-4 فقط)</a:t>
+              <a:t>جزء 6: مواصفات وتحديد أولويات الميزات (MVP)</a:t>
             </a:r>
           </a:p>
         </p:txBody>
@@ -4423,288 +4687,7 @@
               </a:defRPr>
             </a:pPr>
             <a:r>
-              <a:t>تحليل المراحل الأربعة الأساسية لنموذج العمل التجاري (BMC)</a:t>
-            </a:r>
-          </a:p>
-        </p:txBody>
-      </p:sp>
-      <p:sp>
-        <p:nvSpPr>
-          <p:cNvPr id="4" name="TextBox 3"/>
-          <p:cNvSpPr txBox="1"/>
-          <p:nvPr/>
-        </p:nvSpPr>
-        <p:spPr>
-          <a:xfrm>
-            <a:off x="914400" y="1645920"/>
-            <a:ext cx="10360152" cy="4572000"/>
-          </a:xfrm>
-          <a:prstGeom prst="rect">
-            <a:avLst/>
-          </a:prstGeom>
-          <a:noFill/>
-        </p:spPr>
-        <p:txBody>
-          <a:bodyPr wrap="square">
-            <a:spAutoFit/>
-          </a:bodyPr>
-          <a:lstStyle/>
-          <a:p>
-            <a:pPr algn="r">
-              <a:spcAft>
-                <a:spcPts val="1200"/>
-              </a:spcAft>
-              <a:defRPr sz="2000" b="1">
-                <a:solidFill>
-                  <a:srgbClr val="FFFFFF"/>
-                </a:solidFill>
-                <a:latin typeface="Arial"/>
-              </a:defRPr>
-            </a:pPr>
-            <a:r>
-              <a:t>1. شرائح العملاء (Customer Segments):</a:t>
-            </a:r>
-          </a:p>
-          <a:p>
-            <a:pPr lvl="1" algn="r">
-              <a:spcAft>
-                <a:spcPts val="1200"/>
-              </a:spcAft>
-              <a:defRPr sz="1600">
-                <a:solidFill>
-                  <a:srgbClr val="A0AEC0"/>
-                </a:solidFill>
-                <a:latin typeface="Arial"/>
-              </a:defRPr>
-            </a:pPr>
-            <a:r>
-              <a:t>العمال والمصابون في القدس الشرقية المتحدثون بالعربية أو العبرية.</a:t>
-            </a:r>
-          </a:p>
-          <a:p>
-            <a:pPr lvl="1" algn="r">
-              <a:spcAft>
-                <a:spcPts val="1200"/>
-              </a:spcAft>
-              <a:defRPr sz="1600">
-                <a:solidFill>
-                  <a:srgbClr val="A0AEC0"/>
-                </a:solidFill>
-                <a:latin typeface="Arial"/>
-              </a:defRPr>
-            </a:pPr>
-            <a:r>
-              <a:t>مكاتب المحاماة المتخصصة في قضايا التعويضات الباحثة عن ملفات عملاء مصفاة وجاهزة.</a:t>
-            </a:r>
-          </a:p>
-          <a:p>
-            <a:pPr algn="r">
-              <a:spcAft>
-                <a:spcPts val="1200"/>
-              </a:spcAft>
-              <a:defRPr sz="2000" b="1">
-                <a:solidFill>
-                  <a:srgbClr val="FFFFFF"/>
-                </a:solidFill>
-                <a:latin typeface="Arial"/>
-              </a:defRPr>
-            </a:pPr>
-            <a:r>
-              <a:t>2. القيمة المضافة (Value Propositions):</a:t>
-            </a:r>
-          </a:p>
-          <a:p>
-            <a:pPr lvl="1" algn="r">
-              <a:spcAft>
-                <a:spcPts val="1200"/>
-              </a:spcAft>
-              <a:defRPr sz="1600">
-                <a:solidFill>
-                  <a:srgbClr val="A0AEC0"/>
-                </a:solidFill>
-                <a:latin typeface="Arial"/>
-              </a:defRPr>
-            </a:pPr>
-            <a:r>
-              <a:t>للعميل: فحص فوري وسلس بلغة الأم وتصفية صوتية دون مخاطر مالية مسبقة.</a:t>
-            </a:r>
-          </a:p>
-          <a:p>
-            <a:pPr lvl="1" algn="r">
-              <a:spcAft>
-                <a:spcPts val="1200"/>
-              </a:spcAft>
-              <a:defRPr sz="1600">
-                <a:solidFill>
-                  <a:srgbClr val="A0AEC0"/>
-                </a:solidFill>
-                <a:latin typeface="Arial"/>
-              </a:defRPr>
-            </a:pPr>
-            <a:r>
-              <a:t>للمحامي: استلام ملف قضية متكامل ومبني قانونياً ومصنف دون جهد إدخال وتصفية يدوي.</a:t>
-            </a:r>
-          </a:p>
-          <a:p>
-            <a:pPr algn="r">
-              <a:spcAft>
-                <a:spcPts val="1200"/>
-              </a:spcAft>
-              <a:defRPr sz="2000" b="1">
-                <a:solidFill>
-                  <a:srgbClr val="FFFFFF"/>
-                </a:solidFill>
-                <a:latin typeface="Arial"/>
-              </a:defRPr>
-            </a:pPr>
-            <a:r>
-              <a:t>3. القنوات (Channels):</a:t>
-            </a:r>
-          </a:p>
-          <a:p>
-            <a:pPr lvl="1" algn="r">
-              <a:spcAft>
-                <a:spcPts val="1200"/>
-              </a:spcAft>
-              <a:defRPr sz="1600">
-                <a:solidFill>
-                  <a:srgbClr val="A0AEC0"/>
-                </a:solidFill>
-                <a:latin typeface="Arial"/>
-              </a:defRPr>
-            </a:pPr>
-            <a:r>
-              <a:t>التسويق المدفوع والمجاني على محركات البحث (SEO/SEM) باللغة العربية، المجموعات المهنية وتجمعات العمال في القدس.</a:t>
-            </a:r>
-          </a:p>
-          <a:p>
-            <a:pPr algn="r">
-              <a:spcAft>
-                <a:spcPts val="1200"/>
-              </a:spcAft>
-              <a:defRPr sz="2000" b="1">
-                <a:solidFill>
-                  <a:srgbClr val="FFFFFF"/>
-                </a:solidFill>
-                <a:latin typeface="Arial"/>
-              </a:defRPr>
-            </a:pPr>
-            <a:r>
-              <a:t>4. علاقات العملاء (Customer Relationships):</a:t>
-            </a:r>
-          </a:p>
-          <a:p>
-            <a:pPr lvl="1" algn="r">
-              <a:spcAft>
-                <a:spcPts val="1200"/>
-              </a:spcAft>
-              <a:defRPr sz="1600">
-                <a:solidFill>
-                  <a:srgbClr val="A0AEC0"/>
-                </a:solidFill>
-                <a:latin typeface="Arial"/>
-              </a:defRPr>
-            </a:pPr>
-            <a:r>
-              <a:t>علاقة مبنية على الخصوصية والمصداقية العالية (خيار الحذف الفوري للبيانات)، وتوجيه ودود وتفاعلي عبر الدردشة.</a:t>
-            </a:r>
-          </a:p>
-        </p:txBody>
-      </p:sp>
-    </p:spTree>
-  </p:cSld>
-  <p:clrMapOvr>
-    <a:masterClrMapping/>
-  </p:clrMapOvr>
-</p:sld>
-</file>
-
-<file path=ppt/slides/slide7.xml><?xml version="1.0" encoding="utf-8"?>
-<p:sld xmlns:a="http://schemas.openxmlformats.org/drawingml/2006/main" xmlns:p="http://schemas.openxmlformats.org/presentationml/2006/main" xmlns:r="http://schemas.openxmlformats.org/officeDocument/2006/relationships">
-  <p:cSld>
-    <p:bg>
-      <p:bgPr>
-        <a:solidFill>
-          <a:srgbClr val="0D0F17"/>
-        </a:solidFill>
-        <a:effectLst/>
-      </p:bgPr>
-    </p:bg>
-    <p:spTree>
-      <p:nvGrpSpPr>
-        <p:cNvPr id="1" name=""/>
-        <p:cNvGrpSpPr/>
-        <p:nvPr/>
-      </p:nvGrpSpPr>
-      <p:grpSpPr/>
-      <p:sp>
-        <p:nvSpPr>
-          <p:cNvPr id="2" name="TextBox 1"/>
-          <p:cNvSpPr txBox="1"/>
-          <p:nvPr/>
-        </p:nvSpPr>
-        <p:spPr>
-          <a:xfrm>
-            <a:off x="914400" y="365760"/>
-            <a:ext cx="10360152" cy="365760"/>
-          </a:xfrm>
-          <a:prstGeom prst="rect">
-            <a:avLst/>
-          </a:prstGeom>
-          <a:noFill/>
-        </p:spPr>
-        <p:txBody>
-          <a:bodyPr wrap="none">
-            <a:spAutoFit/>
-          </a:bodyPr>
-          <a:lstStyle/>
-          <a:p>
-            <a:pPr algn="r">
-              <a:defRPr sz="1200" b="1">
-                <a:solidFill>
-                  <a:srgbClr val="C5A880"/>
-                </a:solidFill>
-                <a:latin typeface="Arial"/>
-              </a:defRPr>
-            </a:pPr>
-            <a:r>
-              <a:t>جزء 6: مواصفات وتحديد أولويات الميزات (MVP)</a:t>
-            </a:r>
-          </a:p>
-        </p:txBody>
-      </p:sp>
-      <p:sp>
-        <p:nvSpPr>
-          <p:cNvPr id="3" name="TextBox 2"/>
-          <p:cNvSpPr txBox="1"/>
-          <p:nvPr/>
-        </p:nvSpPr>
-        <p:spPr>
-          <a:xfrm>
-            <a:off x="914400" y="731520"/>
-            <a:ext cx="10360152" cy="731520"/>
-          </a:xfrm>
-          <a:prstGeom prst="rect">
-            <a:avLst/>
-          </a:prstGeom>
-          <a:noFill/>
-        </p:spPr>
-        <p:txBody>
-          <a:bodyPr wrap="none">
-            <a:spAutoFit/>
-          </a:bodyPr>
-          <a:lstStyle/>
-          <a:p>
-            <a:pPr algn="r">
-              <a:defRPr sz="2800" b="1">
-                <a:solidFill>
-                  <a:srgbClr val="FFFFFF"/>
-                </a:solidFill>
-                <a:latin typeface="Arial"/>
-              </a:defRPr>
-            </a:pPr>
-            <a:r>
-              <a:t>جدول تحديد وتفضيل الميزات الأساسية حسب نموذج MoSCoW</a:t>
+              <a:t>جدول تحديد وتفضيل الميزات الأساسية حسب نموذج MoSCoW (جزء 6)</a:t>
             </a:r>
           </a:p>
         </p:txBody>
@@ -4895,7 +4878,7 @@
                         </a:defRPr>
                       </a:pPr>
                       <a:r>
-                        <a:t>تغيير الأسئلة لمنع التعقيد والتشتيت</a:t>
+                        <a:t>توجيه ذكي للأسئلة يمنع التشتت والتعقيد</a:t>
                       </a:r>
                     </a:p>
                   </a:txBody>
@@ -5017,7 +5000,7 @@
                         </a:defRPr>
                       </a:pPr>
                       <a:r>
-                        <a:t>إزالة عقبات الكتابة على شاشة الموبايل</a:t>
+                        <a:t>إزالة عقبات الكتابة الطبية على الموبايل</a:t>
                       </a:r>
                     </a:p>
                   </a:txBody>
@@ -5089,7 +5072,7 @@
                         </a:defRPr>
                       </a:pPr>
                       <a:r>
-                        <a:t>استخدام الصوت في 50% من الإجابات</a:t>
+                        <a:t>استخدام الصوت في 50% من الحالات</a:t>
                       </a:r>
                     </a:p>
                   </a:txBody>
@@ -5115,7 +5098,7 @@
                         </a:defRPr>
                       </a:pPr>
                       <a:r>
-                        <a:t>شاشة الخصوصية والأمان</a:t>
+                        <a:t>شاشة الأمان المالي</a:t>
                       </a:r>
                     </a:p>
                   </a:txBody>
@@ -5139,7 +5122,7 @@
                         </a:defRPr>
                       </a:pPr>
                       <a:r>
-                        <a:t>إزالة القلق المالي والقانوني للعملاء</a:t>
+                        <a:t>إزالة القلق المالي ('0 شيكل مسبقاً')</a:t>
                       </a:r>
                     </a:p>
                   </a:txBody>
@@ -5261,7 +5244,7 @@
                         </a:defRPr>
                       </a:pPr>
                       <a:r>
-                        <a:t>تنظيم الملفات وتوفير وقت المكتب</a:t>
+                        <a:t>تنظيم الملفات وتنسيق المواعيد وتكامل Outlook</a:t>
                       </a:r>
                     </a:p>
                   </a:txBody>
@@ -5333,7 +5316,7 @@
                         </a:defRPr>
                       </a:pPr>
                       <a:r>
-                        <a:t>تصفح ملف القضية بأقل من 3 دقائق</a:t>
+                        <a:t>تصفح وقراءة ملف القضية بأقل من 3 دقائق</a:t>
                       </a:r>
                     </a:p>
                   </a:txBody>
@@ -5383,7 +5366,7 @@
                         </a:defRPr>
                       </a:pPr>
                       <a:r>
-                        <a:t>رفع المستندات والتقارير الطبية بسهولة</a:t>
+                        <a:t>رفع التقارير الطبية والمستندات بمرونة</a:t>
                       </a:r>
                     </a:p>
                   </a:txBody>
@@ -5478,6 +5461,303 @@
 </p:sld>
 </file>
 
+<file path=ppt/slides/slide7.xml><?xml version="1.0" encoding="utf-8"?>
+<p:sld xmlns:a="http://schemas.openxmlformats.org/drawingml/2006/main" xmlns:p="http://schemas.openxmlformats.org/presentationml/2006/main" xmlns:r="http://schemas.openxmlformats.org/officeDocument/2006/relationships">
+  <p:cSld>
+    <p:bg>
+      <p:bgPr>
+        <a:solidFill>
+          <a:srgbClr val="0D0F17"/>
+        </a:solidFill>
+        <a:effectLst/>
+      </p:bgPr>
+    </p:bg>
+    <p:spTree>
+      <p:nvGrpSpPr>
+        <p:cNvPr id="1" name=""/>
+        <p:cNvGrpSpPr/>
+        <p:nvPr/>
+      </p:nvGrpSpPr>
+      <p:grpSpPr/>
+      <p:sp>
+        <p:nvSpPr>
+          <p:cNvPr id="2" name="TextBox 1"/>
+          <p:cNvSpPr txBox="1"/>
+          <p:nvPr/>
+        </p:nvSpPr>
+        <p:spPr>
+          <a:xfrm>
+            <a:off x="914400" y="365760"/>
+            <a:ext cx="10360152" cy="365760"/>
+          </a:xfrm>
+          <a:prstGeom prst="rect">
+            <a:avLst/>
+          </a:prstGeom>
+          <a:noFill/>
+        </p:spPr>
+        <p:txBody>
+          <a:bodyPr wrap="none">
+            <a:spAutoFit/>
+          </a:bodyPr>
+          <a:lstStyle/>
+          <a:p>
+            <a:pPr algn="r">
+              <a:defRPr sz="1200" b="1">
+                <a:solidFill>
+                  <a:srgbClr val="C5A880"/>
+                </a:solidFill>
+                <a:latin typeface="Arial"/>
+              </a:defRPr>
+            </a:pPr>
+            <a:r>
+              <a:t>جزء 7 وجزء 8: النموذج الأولي العملي وتقرير سهولة الاستخدام</a:t>
+            </a:r>
+          </a:p>
+        </p:txBody>
+      </p:sp>
+      <p:sp>
+        <p:nvSpPr>
+          <p:cNvPr id="3" name="TextBox 2"/>
+          <p:cNvSpPr txBox="1"/>
+          <p:nvPr/>
+        </p:nvSpPr>
+        <p:spPr>
+          <a:xfrm>
+            <a:off x="914400" y="731520"/>
+            <a:ext cx="10360152" cy="731520"/>
+          </a:xfrm>
+          <a:prstGeom prst="rect">
+            <a:avLst/>
+          </a:prstGeom>
+          <a:noFill/>
+        </p:spPr>
+        <p:txBody>
+          <a:bodyPr wrap="none">
+            <a:spAutoFit/>
+          </a:bodyPr>
+          <a:lstStyle/>
+          <a:p>
+            <a:pPr algn="r">
+              <a:defRPr sz="2800" b="1">
+                <a:solidFill>
+                  <a:srgbClr val="FFFFFF"/>
+                </a:solidFill>
+                <a:latin typeface="Arial"/>
+              </a:defRPr>
+            </a:pPr>
+            <a:r>
+              <a:t>النموذج الأولي العملي وتقرير سهولة الاستخدام والقياس (جزء 7-8)</a:t>
+            </a:r>
+          </a:p>
+        </p:txBody>
+      </p:sp>
+      <p:sp>
+        <p:nvSpPr>
+          <p:cNvPr id="4" name="TextBox 3"/>
+          <p:cNvSpPr txBox="1"/>
+          <p:nvPr/>
+        </p:nvSpPr>
+        <p:spPr>
+          <a:xfrm>
+            <a:off x="914400" y="1645920"/>
+            <a:ext cx="10360152" cy="4572000"/>
+          </a:xfrm>
+          <a:prstGeom prst="rect">
+            <a:avLst/>
+          </a:prstGeom>
+          <a:noFill/>
+        </p:spPr>
+        <p:txBody>
+          <a:bodyPr wrap="square">
+            <a:spAutoFit/>
+          </a:bodyPr>
+          <a:lstStyle/>
+          <a:p>
+            <a:pPr algn="r">
+              <a:spcAft>
+                <a:spcPts val="1000"/>
+              </a:spcAft>
+              <a:defRPr sz="1900" b="1">
+                <a:solidFill>
+                  <a:srgbClr val="FFFFFF"/>
+                </a:solidFill>
+                <a:latin typeface="Arial"/>
+              </a:defRPr>
+            </a:pPr>
+            <a:r>
+              <a:t>🔗 روابط تجربة النموذج الأولي الفعال:</a:t>
+            </a:r>
+          </a:p>
+          <a:p>
+            <a:pPr lvl="1" algn="r">
+              <a:spcAft>
+                <a:spcPts val="1000"/>
+              </a:spcAft>
+              <a:defRPr sz="1600">
+                <a:solidFill>
+                  <a:srgbClr val="A0AEC0"/>
+                </a:solidFill>
+                <a:latin typeface="Arial"/>
+              </a:defRPr>
+            </a:pPr>
+            <a:r>
+              <a:t>الاستبيان وحجز المواعيد للزبون: http://localhost:8000/client_intake.html</a:t>
+            </a:r>
+          </a:p>
+          <a:p>
+            <a:pPr lvl="1" algn="r">
+              <a:spcAft>
+                <a:spcPts val="1000"/>
+              </a:spcAft>
+              <a:defRPr sz="1600">
+                <a:solidFill>
+                  <a:srgbClr val="A0AEC0"/>
+                </a:solidFill>
+                <a:latin typeface="Arial"/>
+              </a:defRPr>
+            </a:pPr>
+            <a:r>
+              <a:t>لوحة تحكم المحامي وإدارة المكاتب: http://localhost:8000/lawyer_dashboard.html</a:t>
+            </a:r>
+          </a:p>
+          <a:p>
+            <a:pPr algn="r">
+              <a:spcAft>
+                <a:spcPts val="1000"/>
+              </a:spcAft>
+              <a:defRPr sz="1900" b="1">
+                <a:solidFill>
+                  <a:srgbClr val="FFFFFF"/>
+                </a:solidFill>
+                <a:latin typeface="Arial"/>
+              </a:defRPr>
+            </a:pPr>
+            <a:r>
+              <a:t>📈 خطوات تدفق الموكل والمحامي في النظام:</a:t>
+            </a:r>
+          </a:p>
+          <a:p>
+            <a:pPr lvl="1" algn="r">
+              <a:spcAft>
+                <a:spcPts val="1000"/>
+              </a:spcAft>
+              <a:defRPr sz="1600">
+                <a:solidFill>
+                  <a:srgbClr val="A0AEC0"/>
+                </a:solidFill>
+                <a:latin typeface="Arial"/>
+              </a:defRPr>
+            </a:pPr>
+            <a:r>
+              <a:t>اختيار اللغة والبدء بالدردشة -&gt; التسجيل الصوتي لشرح الإصابة -&gt; الحصول على تقييم أولي وحجز موعد فوري -&gt; استلام المحامي للملف في لوحة التحكم وتنسيق الموعد تلقائياً مع Outlook.</a:t>
+            </a:r>
+          </a:p>
+          <a:p>
+            <a:pPr algn="r">
+              <a:spcAft>
+                <a:spcPts val="1000"/>
+              </a:spcAft>
+              <a:defRPr sz="1900" b="1">
+                <a:solidFill>
+                  <a:srgbClr val="FFFFFF"/>
+                </a:solidFill>
+                <a:latin typeface="Arial"/>
+              </a:defRPr>
+            </a:pPr>
+            <a:r>
+              <a:t>📊 تقرير سهولة الاستخدام والقياس بالأرقام (Usability Report):</a:t>
+            </a:r>
+          </a:p>
+          <a:p>
+            <a:pPr lvl="1" algn="r">
+              <a:spcAft>
+                <a:spcPts val="1000"/>
+              </a:spcAft>
+              <a:defRPr sz="1600">
+                <a:solidFill>
+                  <a:srgbClr val="A0AEC0"/>
+                </a:solidFill>
+                <a:latin typeface="Arial"/>
+              </a:defRPr>
+            </a:pPr>
+            <a:r>
+              <a:t>جولتا اختبارات شמישות على 6 مشاركين من الجمهور المستهدف ومحامٍ واحد.</a:t>
+            </a:r>
+          </a:p>
+          <a:p>
+            <a:pPr lvl="1" algn="r">
+              <a:spcAft>
+                <a:spcPts val="1000"/>
+              </a:spcAft>
+              <a:defRPr sz="1600">
+                <a:solidFill>
+                  <a:srgbClr val="A0AEC0"/>
+                </a:solidFill>
+                <a:latin typeface="Arial"/>
+              </a:defRPr>
+            </a:pPr>
+            <a:r>
+              <a:t>التحسينات المنجزة: تأخير طلب الهاتف للنهاية ووضع رسالة أمان ('0 شيكل') | تعريب زر التأكيد حسب الواجهة | تفعيل التصفية التلقائية.</a:t>
+            </a:r>
+          </a:p>
+          <a:p>
+            <a:pPr algn="r">
+              <a:spcAft>
+                <a:spcPts val="1000"/>
+              </a:spcAft>
+              <a:defRPr sz="1900" b="1">
+                <a:solidFill>
+                  <a:srgbClr val="FFFFFF"/>
+                </a:solidFill>
+                <a:latin typeface="Arial"/>
+              </a:defRPr>
+            </a:pPr>
+            <a:r>
+              <a:t> مقارنة المقاييس الرقمية (الجولة 1 مقابل الجولة 2):</a:t>
+            </a:r>
+          </a:p>
+          <a:p>
+            <a:pPr lvl="1" algn="r">
+              <a:spcAft>
+                <a:spcPts val="1000"/>
+              </a:spcAft>
+              <a:defRPr sz="1600">
+                <a:solidFill>
+                  <a:srgbClr val="A0AEC0"/>
+                </a:solidFill>
+                <a:latin typeface="Arial"/>
+              </a:defRPr>
+            </a:pPr>
+            <a:r>
+              <a:t>معدل إكمال الاستبيان (Completion Rate): ارتفع من 60% إلى 90% بفضل رسائل الأمان والصوت.</a:t>
+            </a:r>
+          </a:p>
+          <a:p>
+            <a:pPr lvl="1" algn="r">
+              <a:spcAft>
+                <a:spcPts val="1000"/>
+              </a:spcAft>
+              <a:defRPr sz="1600">
+                <a:solidFill>
+                  <a:srgbClr val="A0AEC0"/>
+                </a:solidFill>
+                <a:latin typeface="Arial"/>
+              </a:defRPr>
+            </a:pPr>
+            <a:r>
+              <a:t>متوسط وقت الإكمال (Time to Complete): انخفض من 5 دقائق إلى دقيقتين فقط بفضل واجهة الإدخال الصوتي وسرعة حجز المواعيد.</a:t>
+            </a:r>
+          </a:p>
+        </p:txBody>
+      </p:sp>
+    </p:spTree>
+  </p:cSld>
+  <p:clrMapOvr>
+    <a:masterClrMapping/>
+  </p:clrMapOvr>
+</p:sld>
+</file>
+
 <file path=ppt/slides/slide8.xml><?xml version="1.0" encoding="utf-8"?>
 <p:sld xmlns:a="http://schemas.openxmlformats.org/drawingml/2006/main" xmlns:p="http://schemas.openxmlformats.org/presentationml/2006/main" xmlns:r="http://schemas.openxmlformats.org/officeDocument/2006/relationships">
   <p:cSld>
@@ -5527,7 +5807,7 @@
               </a:defRPr>
             </a:pPr>
             <a:r>
-              <a:t>جزء 7: النموذج الأولي الفعال</a:t>
+              <a:t>التجربة الشخصية والتحديات التي واجهتها</a:t>
             </a:r>
           </a:p>
         </p:txBody>
@@ -5563,7 +5843,7 @@
               </a:defRPr>
             </a:pPr>
             <a:r>
-              <a:t>خطوات تدفق العميل في النموذج الأولي الفعال (User Flow)</a:t>
+              <a:t>العمل الشخصي والتحديات والصعوبات التقنية التي واجهتها أثناء البناء (شريحة 8)</a:t>
             </a:r>
           </a:p>
         </p:txBody>
@@ -5592,9 +5872,9 @@
           <a:p>
             <a:pPr algn="r">
               <a:spcAft>
-                <a:spcPts val="1200"/>
-              </a:spcAft>
-              <a:defRPr sz="2000" b="1">
+                <a:spcPts val="1000"/>
+              </a:spcAft>
+              <a:defRPr sz="1900" b="1">
                 <a:solidFill>
                   <a:srgbClr val="FFFFFF"/>
                 </a:solidFill>
@@ -5602,13 +5882,29 @@
               </a:defRPr>
             </a:pPr>
             <a:r>
-              <a:t>روابط تجربة النموذج الأولي الفعال:</a:t>
+              <a:t>💡 الصعوبات التقنية والمنتجية التي واجهتها أثناء البناء:</a:t>
+            </a:r>
+          </a:p>
+          <a:p>
+            <a:pPr algn="r">
+              <a:spcAft>
+                <a:spcPts val="1000"/>
+              </a:spcAft>
+              <a:defRPr sz="1900" b="1">
+                <a:solidFill>
+                  <a:srgbClr val="FFFFFF"/>
+                </a:solidFill>
+                <a:latin typeface="Arial"/>
+              </a:defRPr>
+            </a:pPr>
+            <a:r>
+              <a:t>  1. الدمج ثنائي اللغة الديناميكي والكامل:</a:t>
             </a:r>
           </a:p>
           <a:p>
             <a:pPr lvl="1" algn="r">
               <a:spcAft>
-                <a:spcPts val="1200"/>
+                <a:spcPts val="1000"/>
               </a:spcAft>
               <a:defRPr sz="1600">
                 <a:solidFill>
@@ -5618,13 +5914,29 @@
               </a:defRPr>
             </a:pPr>
             <a:r>
-              <a:t>واجهة الاستبيان الرقمي للعميل: http://localhost:8000/client_intake.html</a:t>
+              <a:t>  الصعوبة في الحفاظ على تجربة مستخدم موحدة للدردشة والمستندات، وتجاوب أزرار الاستبيان ديناميكياً عند تحويل اللغة لتجنب تشتيت الزبون.</a:t>
+            </a:r>
+          </a:p>
+          <a:p>
+            <a:pPr algn="r">
+              <a:spcAft>
+                <a:spcPts val="1000"/>
+              </a:spcAft>
+              <a:defRPr sz="1900" b="1">
+                <a:solidFill>
+                  <a:srgbClr val="FFFFFF"/>
+                </a:solidFill>
+                <a:latin typeface="Arial"/>
+              </a:defRPr>
+            </a:pPr>
+            <a:r>
+              <a:t>  2. تحسين تقنية تحويل الصوت إلى نصوص (Web Speech API):</a:t>
             </a:r>
           </a:p>
           <a:p>
             <a:pPr lvl="1" algn="r">
               <a:spcAft>
-                <a:spcPts val="1200"/>
+                <a:spcPts val="1000"/>
               </a:spcAft>
               <a:defRPr sz="1600">
                 <a:solidFill>
@@ -5634,15 +5946,15 @@
               </a:defRPr>
             </a:pPr>
             <a:r>
-              <a:t>لوحة تحكم المحامي المدمجة: http://localhost:8000/lawyer_dashboard.html</a:t>
+              <a:t>  تطلب الأمر ضبط إعدادات التسجيل والتعرف الصوتي لربط وتثبيت النصوص الطويلة بشكل متواصل لمنع مسح التفاصيل السابقة عندما يتوقف الزبون لالتقاط أنفاسه.</a:t>
             </a:r>
           </a:p>
           <a:p>
             <a:pPr algn="r">
               <a:spcAft>
-                <a:spcPts val="1200"/>
-              </a:spcAft>
-              <a:defRPr sz="2000" b="1">
+                <a:spcPts val="1000"/>
+              </a:spcAft>
+              <a:defRPr sz="1900" b="1">
                 <a:solidFill>
                   <a:srgbClr val="FFFFFF"/>
                 </a:solidFill>
@@ -5650,262 +5962,13 @@
               </a:defRPr>
             </a:pPr>
             <a:r>
-              <a:t>خطوات تدفق البيانات والعميل في النظام:</a:t>
-            </a:r>
-          </a:p>
-          <a:p>
-            <a:pPr algn="r">
-              <a:spcAft>
-                <a:spcPts val="1200"/>
-              </a:spcAft>
-              <a:defRPr sz="2000" b="0">
-                <a:solidFill>
-                  <a:srgbClr val="FFFFFF"/>
-                </a:solidFill>
-                <a:latin typeface="Arial"/>
-              </a:defRPr>
-            </a:pPr>
-            <a:r>
-              <a:t>  1. اختيار اللغة (العربية/العبرية) من صفحة الهبوط والبدء بالدردشة التفاعلية.</a:t>
-            </a:r>
-          </a:p>
-          <a:p>
-            <a:pPr algn="r">
-              <a:spcAft>
-                <a:spcPts val="1200"/>
-              </a:spcAft>
-              <a:defRPr sz="2000" b="0">
-                <a:solidFill>
-                  <a:srgbClr val="FFFFFF"/>
-                </a:solidFill>
-                <a:latin typeface="Arial"/>
-              </a:defRPr>
-            </a:pPr>
-            <a:r>
-              <a:t>  2. توجيه مخصص للأسئلة بناءً على اختيار نوع الحادثة (تخطي الأسئلة غير اللازمة).</a:t>
-            </a:r>
-          </a:p>
-          <a:p>
-            <a:pPr algn="r">
-              <a:spcAft>
-                <a:spcPts val="1200"/>
-              </a:spcAft>
-              <a:defRPr sz="2000" b="0">
-                <a:solidFill>
-                  <a:srgbClr val="FFFFFF"/>
-                </a:solidFill>
-                <a:latin typeface="Arial"/>
-              </a:defRPr>
-            </a:pPr>
-            <a:r>
-              <a:t>  3. شرح تفاصيل الإصابة صوتياً باستخدام ميزة تحويل الصوت لنصوص (Web Speech API).</a:t>
-            </a:r>
-          </a:p>
-          <a:p>
-            <a:pPr algn="r">
-              <a:spcAft>
-                <a:spcPts val="1200"/>
-              </a:spcAft>
-              <a:defRPr sz="2000" b="0">
-                <a:solidFill>
-                  <a:srgbClr val="FFFFFF"/>
-                </a:solidFill>
-                <a:latin typeface="Arial"/>
-              </a:defRPr>
-            </a:pPr>
-            <a:r>
-              <a:t>  4. الحصول على تقييم أولي مجاني للقضية مع شاشات طمأنة الخصوصية والأمان المالي (0 شيكل).</a:t>
-            </a:r>
-          </a:p>
-          <a:p>
-            <a:pPr algn="r">
-              <a:spcAft>
-                <a:spcPts val="1200"/>
-              </a:spcAft>
-              <a:defRPr sz="2000" b="0">
-                <a:solidFill>
-                  <a:srgbClr val="FFFFFF"/>
-                </a:solidFill>
-                <a:latin typeface="Arial"/>
-              </a:defRPr>
-            </a:pPr>
-            <a:r>
-              <a:t>  5. إرسال الطلب وظهوره فوراً في لوحة المحامي المحدثة مع مزامنتها مع Outlook المهام والمواعيد.</a:t>
-            </a:r>
-          </a:p>
-          <a:p>
-            <a:pPr algn="r">
-              <a:spcAft>
-                <a:spcPts val="1200"/>
-              </a:spcAft>
-              <a:defRPr sz="2000" b="1">
-                <a:solidFill>
-                  <a:srgbClr val="FFFFFF"/>
-                </a:solidFill>
-                <a:latin typeface="Arial"/>
-              </a:defRPr>
-            </a:pPr>
-            <a:r>
-              <a:t>تطور المنتج: الانتقال من تصميم أولي مبسط (Wireframes) إلى نظام متكامل يدعم التسجيل الصوتي وإدارة أرشيف العملاء.</a:t>
-            </a:r>
-          </a:p>
-        </p:txBody>
-      </p:sp>
-    </p:spTree>
-  </p:cSld>
-  <p:clrMapOvr>
-    <a:masterClrMapping/>
-  </p:clrMapOvr>
-</p:sld>
-</file>
-
-<file path=ppt/slides/slide9.xml><?xml version="1.0" encoding="utf-8"?>
-<p:sld xmlns:a="http://schemas.openxmlformats.org/drawingml/2006/main" xmlns:p="http://schemas.openxmlformats.org/presentationml/2006/main" xmlns:r="http://schemas.openxmlformats.org/officeDocument/2006/relationships">
-  <p:cSld>
-    <p:bg>
-      <p:bgPr>
-        <a:solidFill>
-          <a:srgbClr val="0D0F17"/>
-        </a:solidFill>
-        <a:effectLst/>
-      </p:bgPr>
-    </p:bg>
-    <p:spTree>
-      <p:nvGrpSpPr>
-        <p:cNvPr id="1" name=""/>
-        <p:cNvGrpSpPr/>
-        <p:nvPr/>
-      </p:nvGrpSpPr>
-      <p:grpSpPr/>
-      <p:sp>
-        <p:nvSpPr>
-          <p:cNvPr id="2" name="TextBox 1"/>
-          <p:cNvSpPr txBox="1"/>
-          <p:nvPr/>
-        </p:nvSpPr>
-        <p:spPr>
-          <a:xfrm>
-            <a:off x="914400" y="365760"/>
-            <a:ext cx="10360152" cy="365760"/>
-          </a:xfrm>
-          <a:prstGeom prst="rect">
-            <a:avLst/>
-          </a:prstGeom>
-          <a:noFill/>
-        </p:spPr>
-        <p:txBody>
-          <a:bodyPr wrap="none">
-            <a:spAutoFit/>
-          </a:bodyPr>
-          <a:lstStyle/>
-          <a:p>
-            <a:pPr algn="r">
-              <a:defRPr sz="1200" b="1">
-                <a:solidFill>
-                  <a:srgbClr val="C5A880"/>
-                </a:solidFill>
-                <a:latin typeface="Arial"/>
-              </a:defRPr>
-            </a:pPr>
-            <a:r>
-              <a:t>جزء 8: تقرير سهولة الاستخدام والقياس</a:t>
-            </a:r>
-          </a:p>
-        </p:txBody>
-      </p:sp>
-      <p:sp>
-        <p:nvSpPr>
-          <p:cNvPr id="3" name="TextBox 2"/>
-          <p:cNvSpPr txBox="1"/>
-          <p:nvPr/>
-        </p:nvSpPr>
-        <p:spPr>
-          <a:xfrm>
-            <a:off x="914400" y="731520"/>
-            <a:ext cx="10360152" cy="731520"/>
-          </a:xfrm>
-          <a:prstGeom prst="rect">
-            <a:avLst/>
-          </a:prstGeom>
-          <a:noFill/>
-        </p:spPr>
-        <p:txBody>
-          <a:bodyPr wrap="none">
-            <a:spAutoFit/>
-          </a:bodyPr>
-          <a:lstStyle/>
-          <a:p>
-            <a:pPr algn="r">
-              <a:defRPr sz="2800" b="1">
-                <a:solidFill>
-                  <a:srgbClr val="FFFFFF"/>
-                </a:solidFill>
-                <a:latin typeface="Arial"/>
-              </a:defRPr>
-            </a:pPr>
-            <a:r>
-              <a:t>نتائج جولتي الاختبارات ومقارنة القياسات الكمية</a:t>
-            </a:r>
-          </a:p>
-        </p:txBody>
-      </p:sp>
-      <p:sp>
-        <p:nvSpPr>
-          <p:cNvPr id="4" name="TextBox 3"/>
-          <p:cNvSpPr txBox="1"/>
-          <p:nvPr/>
-        </p:nvSpPr>
-        <p:spPr>
-          <a:xfrm>
-            <a:off x="914400" y="1645920"/>
-            <a:ext cx="10360152" cy="4572000"/>
-          </a:xfrm>
-          <a:prstGeom prst="rect">
-            <a:avLst/>
-          </a:prstGeom>
-          <a:noFill/>
-        </p:spPr>
-        <p:txBody>
-          <a:bodyPr wrap="square">
-            <a:spAutoFit/>
-          </a:bodyPr>
-          <a:lstStyle/>
-          <a:p>
-            <a:pPr algn="r">
-              <a:spcAft>
-                <a:spcPts val="1200"/>
-              </a:spcAft>
-              <a:defRPr sz="2000" b="1">
-                <a:solidFill>
-                  <a:srgbClr val="FFFFFF"/>
-                </a:solidFill>
-                <a:latin typeface="Arial"/>
-              </a:defRPr>
-            </a:pPr>
-            <a:r>
-              <a:t>منهجية الفحص والمشاركون: جولتان من اختبارات سهولة الاستخدام الموجهة على 6 مشاركين من الشريحة المستهدفة + محامٍ واحد.</a:t>
-            </a:r>
-          </a:p>
-          <a:p>
-            <a:pPr algn="r">
-              <a:spcAft>
-                <a:spcPts val="1200"/>
-              </a:spcAft>
-              <a:defRPr sz="2000" b="1">
-                <a:solidFill>
-                  <a:srgbClr val="FFFFFF"/>
-                </a:solidFill>
-                <a:latin typeface="Arial"/>
-              </a:defRPr>
-            </a:pPr>
-            <a:r>
-              <a:t>العيوب المكتشفة في الجولة الأولى والحلول المطبقة:</a:t>
+              <a:t>  3. دمج وتأمين بوابة خدمات Microsoft Outlook للمحامي:</a:t>
             </a:r>
           </a:p>
           <a:p>
             <a:pPr lvl="1" algn="r">
               <a:spcAft>
-                <a:spcPts val="1200"/>
+                <a:spcPts val="1000"/>
               </a:spcAft>
               <a:defRPr sz="1600">
                 <a:solidFill>
@@ -5915,135 +5978,7 @@
               </a:defRPr>
             </a:pPr>
             <a:r>
-              <a:t>مشكلة هجر خطوة رقم الهاتف: تم حلها بتأخير الطلب للنهاية وعرض رسائل الأمان المالي ('0 شيكل') مسبقاً.</a:t>
-            </a:r>
-          </a:p>
-          <a:p>
-            <a:pPr lvl="1" algn="r">
-              <a:spcAft>
-                <a:spcPts val="1200"/>
-              </a:spcAft>
-              <a:defRPr sz="1600">
-                <a:solidFill>
-                  <a:srgbClr val="A0AEC0"/>
-                </a:solidFill>
-                <a:latin typeface="Arial"/>
-              </a:defRPr>
-            </a:pPr>
-            <a:r>
-              <a:t>أزرار غير معربة: قمنا بعمل لولكيزציה كاملة لزر التأكيد ('OK' / 'אישור' / 'موافق') بناءً على لغة الواجهة.</a:t>
-            </a:r>
-          </a:p>
-          <a:p>
-            <a:pPr lvl="1" algn="r">
-              <a:spcAft>
-                <a:spcPts val="1200"/>
-              </a:spcAft>
-              <a:defRPr sz="1600">
-                <a:solidFill>
-                  <a:srgbClr val="A0AEC0"/>
-                </a:solidFill>
-                <a:latin typeface="Arial"/>
-              </a:defRPr>
-            </a:pPr>
-            <a:r>
-              <a:t>توقف التسجيل الصوتي: تم تحديث كود الـ API لربط وتسجيل الصوت المتواصل دون مسح النصوص السابقة.</a:t>
-            </a:r>
-          </a:p>
-          <a:p>
-            <a:pPr algn="r">
-              <a:spcAft>
-                <a:spcPts val="1200"/>
-              </a:spcAft>
-              <a:defRPr sz="2000" b="1">
-                <a:solidFill>
-                  <a:srgbClr val="FFFFFF"/>
-                </a:solidFill>
-                <a:latin typeface="Arial"/>
-              </a:defRPr>
-            </a:pPr>
-            <a:r>
-              <a:t>مقارنة القياسات الكمية (الجولة الأولى مقابل الجولة الثانية):</a:t>
-            </a:r>
-          </a:p>
-          <a:p>
-            <a:pPr lvl="1" algn="r">
-              <a:spcAft>
-                <a:spcPts val="1200"/>
-              </a:spcAft>
-              <a:defRPr sz="1600">
-                <a:solidFill>
-                  <a:srgbClr val="A0AEC0"/>
-                </a:solidFill>
-                <a:latin typeface="Arial"/>
-              </a:defRPr>
-            </a:pPr>
-            <a:r>
-              <a:t>معدل إكمال الاستبيان (Completion Rate): ارتفع من 60% في الجولة الأولى إلى 90% في الثانية.</a:t>
-            </a:r>
-          </a:p>
-          <a:p>
-            <a:pPr lvl="1" algn="r">
-              <a:spcAft>
-                <a:spcPts val="1200"/>
-              </a:spcAft>
-              <a:defRPr sz="1600">
-                <a:solidFill>
-                  <a:srgbClr val="A0AEC0"/>
-                </a:solidFill>
-                <a:latin typeface="Arial"/>
-              </a:defRPr>
-            </a:pPr>
-            <a:r>
-              <a:t>متوسط وقت الإكمال (Time to Complete): انخفض من 5 دقائق في الجولة الأولى إلى دقيقتين فقط بفضل الإدخال الصوتي.</a:t>
-            </a:r>
-          </a:p>
-          <a:p>
-            <a:pPr algn="r">
-              <a:spcAft>
-                <a:spcPts val="1200"/>
-              </a:spcAft>
-              <a:defRPr sz="2000" b="1">
-                <a:solidFill>
-                  <a:srgbClr val="FFFFFF"/>
-                </a:solidFill>
-                <a:latin typeface="Arial"/>
-              </a:defRPr>
-            </a:pPr>
-            <a:r>
-              <a:t>التوصيات للمستقبل (Next Steps):</a:t>
-            </a:r>
-          </a:p>
-          <a:p>
-            <a:pPr algn="r">
-              <a:spcAft>
-                <a:spcPts val="1200"/>
-              </a:spcAft>
-              <a:defRPr sz="2000" b="0">
-                <a:solidFill>
-                  <a:srgbClr val="FFFFFF"/>
-                </a:solidFill>
-                <a:latin typeface="Arial"/>
-              </a:defRPr>
-            </a:pPr>
-            <a:r>
-              <a:t>  1. التوسع ونقل الميزة بالكامل نحو منصة WhatsApp Business API لزيادة الوصول وتسهيل الاستخدام.</a:t>
-            </a:r>
-          </a:p>
-          <a:p>
-            <a:pPr algn="r">
-              <a:spcAft>
-                <a:spcPts val="1200"/>
-              </a:spcAft>
-              <a:defRPr sz="2000" b="0">
-                <a:solidFill>
-                  <a:srgbClr val="FFFFFF"/>
-                </a:solidFill>
-                <a:latin typeface="Arial"/>
-              </a:defRPr>
-            </a:pPr>
-            <a:r>
-              <a:t>  2. تطوير محرك ذكاء اصطناعي لتصنيف نسبة العجز الطبي تلقائياً وربطها ببنود مؤسسة التأمين الوطني.</a:t>
+              <a:t>  واجهنا عائق منع التضمين (X-Frame-Options) للبريد الإلكتروني الحقيقي بداخل الموقع. قمنا بحل ذلك عن طريق بناء شريط أدوات Microsoft 365 الجانبي الذي يفتح التطبيقات بنوافذ مستقلة وآمنة لتسجيل الدخول التلقائي (SSO) عبر حساب ويندوز النشط للمحامي.</a:t>
             </a:r>
           </a:p>
         </p:txBody>
